--- a/dist/초4/영어/표현과문화/초4_영어_표현과문화_02_생활예절비교_학생용.pptx
+++ b/dist/초4/영어/표현과문화/초4_영어_표현과문화_02_생활예절비교_학생용.pptx
@@ -120,13 +120,13 @@
   <p:extLst>
     <p:ext uri="{521415D9-36F7-43E2-AB2F-B90AF26B5E84}">
       <p14:sectionLst xmlns:p14="http://schemas.microsoft.com/office/powerpoint/2010/main">
-        <p14:section name="도입" id="{d0189bc6-fc9a-96ae-0c4a-5520ebe1d3a0}">
+        <p14:section name="도입" id="{d29afde4-88cb-9229-828f-1ef19e96f1bf}">
           <p14:sldIdLst>
             <p14:sldId id="256"/>
             <p14:sldId id="257"/>
           </p14:sldIdLst>
         </p14:section>
-        <p14:section name="개념" id="{92fcc046-ebad-5c9f-1cfa-5badae35b80d}">
+        <p14:section name="개념" id="{4ab765a1-b62e-f63f-83d7-ca552bf1b1f9}">
           <p14:sldIdLst>
             <p14:sldId id="258"/>
             <p14:sldId id="259"/>
@@ -135,31 +135,31 @@
             <p14:sldId id="264"/>
           </p14:sldIdLst>
         </p14:section>
-        <p14:section name="연습" id="{c741bdc4-ecf1-4c12-887e-e6f3fddb2e5d}">
+        <p14:section name="연습" id="{da7423b1-bff4-5a9f-9d21-46644ff4ea3a}">
           <p14:sldIdLst>
             <p14:sldId id="261"/>
             <p14:sldId id="262"/>
             <p14:sldId id="265"/>
           </p14:sldIdLst>
         </p14:section>
-        <p14:section name="개념" id="{f5d6ce22-606c-9909-1703-8a6e8d44b0d3}">
+        <p14:section name="개념" id="{f6571a35-8b70-7677-500e-de4b3878dccc}">
           <p14:sldIdLst/>
         </p14:section>
-        <p14:section name="연습" id="{1a48ca60-cf3d-5f94-a19b-7a59a8485a9d}">
+        <p14:section name="연습" id="{e2b3cf0e-52f0-02e0-603a-c6b51fb5cb44}">
           <p14:sldIdLst/>
         </p14:section>
-        <p14:section name="확인" id="{f8352152-201a-8ae2-ff37-9e354574d1d5}">
+        <p14:section name="확인" id="{185ed78b-6f9c-9352-a2e7-268fe75605ca}">
           <p14:sldIdLst>
             <p14:sldId id="266"/>
             <p14:sldId id="267"/>
           </p14:sldIdLst>
         </p14:section>
-        <p14:section name="정리" id="{b8a24fb2-a89e-591b-d48b-0c3aafb301db}">
+        <p14:section name="정리" id="{9480f835-0b59-e110-b4c8-a6d9fac0f398}">
           <p14:sldIdLst>
             <p14:sldId id="268"/>
           </p14:sldIdLst>
         </p14:section>
-        <p14:section name="보충" id="{ca628046-5591-f358-a8f1-5108a89edaa0}">
+        <p14:section name="보충" id="{eea1b8b6-e0c8-ca95-cdf1-2ce851fa3783}">
           <p14:sldIdLst>
             <p14:sldId id="269"/>
           </p14:sldIdLst>
